--- a/dataset/guides_final/SYS/manual/IT-SYS-007-M_인사·근태 문의 처리 매뉴얼.pptx
+++ b/dataset/guides_final/SYS/manual/IT-SYS-007-M_인사·근태 문의 처리 매뉴얼.pptx
@@ -21868,7 +21868,7 @@
                 <a:ea typeface="Malgun Gothic"/>
                 <a:cs typeface="Malgun Gothic"/>
               </a:rPr>
-              <a:t>티켓: 담당자 조치가 필요한 건. 담당팀에 배정하고 상태를 RDY → IP → FIN → CLS 으로 관리한다.</a:t>
+              <a:t>티켓: 담당자 조치가 필요한 건. 담당팀에 배정하고 상태를 RDY → WIP → FIN → CLS 으로 관리한다.</a:t>
             </a:r>
           </a:p>
         </p:txBody>

--- a/dataset/guides_final/SYS/manual/IT-SYS-007-M_인사·근태 문의 처리 매뉴얼.pptx
+++ b/dataset/guides_final/SYS/manual/IT-SYS-007-M_인사·근태 문의 처리 매뉴얼.pptx
@@ -3232,7 +3232,7 @@
                 <a:ea typeface="Malgun Gothic"/>
                 <a:cs typeface="Malgun Gothic"/>
               </a:rPr>
-              <a:t>한화시스템 ICT IT 담당자 매뉴얼 · 사내 시스템</a:t>
+              <a:t>가상 ICT 기업 IT 담당자 매뉴얼 · 사내 시스템</a:t>
             </a:r>
           </a:p>
         </p:txBody>
@@ -3511,7 +3511,7 @@
                 <a:ea typeface="Malgun Gothic"/>
                 <a:cs typeface="Malgun Gothic"/>
               </a:rPr>
-              <a:t>© HANWHA SYSTEMS ICT · IT-SYS-007-M · 사내 제한</a:t>
+              <a:t>© 가상 ICT 기업 · IT-SYS-007-M · 사내 제한</a:t>
             </a:r>
           </a:p>
         </p:txBody>
@@ -6127,7 +6127,7 @@
                 <a:ea typeface="Malgun Gothic"/>
                 <a:cs typeface="Malgun Gothic"/>
               </a:rPr>
-              <a:t>© HANWHA SYSTEMS ICT · IT-SYS-007-M · 사내 제한</a:t>
+              <a:t>© 가상 ICT 기업 · IT-SYS-007-M · 사내 제한</a:t>
             </a:r>
           </a:p>
         </p:txBody>
@@ -8555,7 +8555,7 @@
                 <a:ea typeface="Malgun Gothic"/>
                 <a:cs typeface="Malgun Gothic"/>
               </a:rPr>
-              <a:t>© HANWHA SYSTEMS ICT · IT-SYS-007-M · 사내 제한</a:t>
+              <a:t>© 가상 ICT 기업 · IT-SYS-007-M · 사내 제한</a:t>
             </a:r>
           </a:p>
         </p:txBody>
@@ -11101,7 +11101,7 @@
                 <a:ea typeface="Malgun Gothic"/>
                 <a:cs typeface="Malgun Gothic"/>
               </a:rPr>
-              <a:t>© HANWHA SYSTEMS ICT · IT-SYS-007-M · 사내 제한</a:t>
+              <a:t>© 가상 ICT 기업 · IT-SYS-007-M · 사내 제한</a:t>
             </a:r>
           </a:p>
         </p:txBody>
@@ -11349,7 +11349,7 @@
                 <a:ea typeface="Malgun Gothic"/>
                 <a:cs typeface="Malgun Gothic"/>
               </a:rPr>
-              <a:t>© HANWHA SYSTEMS ICT · IT-SYS-007-M · 사내 제한</a:t>
+              <a:t>© 가상 ICT 기업 · IT-SYS-007-M · 사내 제한</a:t>
             </a:r>
           </a:p>
         </p:txBody>
@@ -12008,7 +12008,7 @@
                 <a:ea typeface="Malgun Gothic"/>
                 <a:cs typeface="Malgun Gothic"/>
               </a:rPr>
-              <a:t>© HANWHA SYSTEMS ICT · IT-SYS-007-M · 사내 제한</a:t>
+              <a:t>© 가상 ICT 기업 · IT-SYS-007-M · 사내 제한</a:t>
             </a:r>
           </a:p>
         </p:txBody>
@@ -12256,7 +12256,7 @@
                 <a:ea typeface="Malgun Gothic"/>
                 <a:cs typeface="Malgun Gothic"/>
               </a:rPr>
-              <a:t>© HANWHA SYSTEMS ICT · IT-SYS-007-M · 사내 제한</a:t>
+              <a:t>© 가상 ICT 기업 · IT-SYS-007-M · 사내 제한</a:t>
             </a:r>
           </a:p>
         </p:txBody>
@@ -13284,7 +13284,7 @@
                 <a:ea typeface="Malgun Gothic"/>
                 <a:cs typeface="Malgun Gothic"/>
               </a:rPr>
-              <a:t>© HANWHA SYSTEMS ICT · IT-SYS-007-M · 사내 제한</a:t>
+              <a:t>© 가상 ICT 기업 · IT-SYS-007-M · 사내 제한</a:t>
             </a:r>
           </a:p>
         </p:txBody>
@@ -13532,7 +13532,7 @@
                 <a:ea typeface="Malgun Gothic"/>
                 <a:cs typeface="Malgun Gothic"/>
               </a:rPr>
-              <a:t>© HANWHA SYSTEMS ICT · IT-SYS-007-M · 사내 제한</a:t>
+              <a:t>© 가상 ICT 기업 · IT-SYS-007-M · 사내 제한</a:t>
             </a:r>
           </a:p>
         </p:txBody>
@@ -14224,7 +14224,7 @@
                 <a:ea typeface="Malgun Gothic"/>
                 <a:cs typeface="Malgun Gothic"/>
               </a:rPr>
-              <a:t>© HANWHA SYSTEMS ICT · IT-SYS-007-M · 사내 제한</a:t>
+              <a:t>© 가상 ICT 기업 · IT-SYS-007-M · 사내 제한</a:t>
             </a:r>
           </a:p>
         </p:txBody>
@@ -15201,7 +15201,7 @@
                 <a:ea typeface="Malgun Gothic"/>
                 <a:cs typeface="Malgun Gothic"/>
               </a:rPr>
-              <a:t>© HANWHA SYSTEMS ICT · IT-SYS-007-M · 사내 제한</a:t>
+              <a:t>© 가상 ICT 기업 · IT-SYS-007-M · 사내 제한</a:t>
             </a:r>
           </a:p>
         </p:txBody>
@@ -16844,7 +16844,7 @@
                 <a:ea typeface="Malgun Gothic"/>
                 <a:cs typeface="Malgun Gothic"/>
               </a:rPr>
-              <a:t>© HANWHA SYSTEMS ICT · IT-SYS-007-M · 사내 제한</a:t>
+              <a:t>© 가상 ICT 기업 · IT-SYS-007-M · 사내 제한</a:t>
             </a:r>
           </a:p>
         </p:txBody>
@@ -17990,7 +17990,7 @@
                 <a:ea typeface="Malgun Gothic"/>
                 <a:cs typeface="Malgun Gothic"/>
               </a:rPr>
-              <a:t>© HANWHA SYSTEMS ICT · IT-SYS-007-M · 사내 제한</a:t>
+              <a:t>© 가상 ICT 기업 · IT-SYS-007-M · 사내 제한</a:t>
             </a:r>
           </a:p>
         </p:txBody>
@@ -18238,7 +18238,7 @@
                 <a:ea typeface="Malgun Gothic"/>
                 <a:cs typeface="Malgun Gothic"/>
               </a:rPr>
-              <a:t>© HANWHA SYSTEMS ICT · IT-SYS-007-M · 사내 제한</a:t>
+              <a:t>© 가상 ICT 기업 · IT-SYS-007-M · 사내 제한</a:t>
             </a:r>
           </a:p>
         </p:txBody>
@@ -19136,7 +19136,7 @@
                 <a:ea typeface="Malgun Gothic"/>
                 <a:cs typeface="Malgun Gothic"/>
               </a:rPr>
-              <a:t>© HANWHA SYSTEMS ICT · IT-SYS-007-M · 사내 제한</a:t>
+              <a:t>© 가상 ICT 기업 · IT-SYS-007-M · 사내 제한</a:t>
             </a:r>
           </a:p>
         </p:txBody>
@@ -19384,7 +19384,7 @@
                 <a:ea typeface="Malgun Gothic"/>
                 <a:cs typeface="Malgun Gothic"/>
               </a:rPr>
-              <a:t>© HANWHA SYSTEMS ICT · IT-SYS-007-M · 사내 제한</a:t>
+              <a:t>© 가상 ICT 기업 · IT-SYS-007-M · 사내 제한</a:t>
             </a:r>
           </a:p>
         </p:txBody>
@@ -22150,7 +22150,7 @@
                 <a:ea typeface="Malgun Gothic"/>
                 <a:cs typeface="Malgun Gothic"/>
               </a:rPr>
-              <a:t>© HANWHA SYSTEMS ICT · IT-SYS-007-M · 사내 제한</a:t>
+              <a:t>© 가상 ICT 기업 · IT-SYS-007-M · 사내 제한</a:t>
             </a:r>
           </a:p>
         </p:txBody>
@@ -22398,7 +22398,7 @@
                 <a:ea typeface="Malgun Gothic"/>
                 <a:cs typeface="Malgun Gothic"/>
               </a:rPr>
-              <a:t>© HANWHA SYSTEMS ICT · IT-SYS-007-M · 사내 제한</a:t>
+              <a:t>© 가상 ICT 기업 · IT-SYS-007-M · 사내 제한</a:t>
             </a:r>
           </a:p>
         </p:txBody>
@@ -24826,7 +24826,7 @@
                 <a:ea typeface="Malgun Gothic"/>
                 <a:cs typeface="Malgun Gothic"/>
               </a:rPr>
-              <a:t>© HANWHA SYSTEMS ICT · IT-SYS-007-M · 사내 제한</a:t>
+              <a:t>© 가상 ICT 기업 · IT-SYS-007-M · 사내 제한</a:t>
             </a:r>
           </a:p>
         </p:txBody>
